--- a/ゲーム科3年/00_前期/オンラインゲームプログラミングⅠ/08_Networkオブジェクト.pptx
+++ b/ゲーム科3年/00_前期/オンラインゲームプログラミングⅠ/08_Networkオブジェクト.pptx
@@ -4455,6 +4455,58 @@
           </a:prstGeom>
         </p:spPr>
       </p:pic>
+      <p:sp>
+        <p:nvSpPr>
+          <p:cNvPr id="5" name="正方形/長方形 4">
+            <a:extLst>
+              <a:ext uri="{FF2B5EF4-FFF2-40B4-BE49-F238E27FC236}">
+                <a16:creationId xmlns:a16="http://schemas.microsoft.com/office/drawing/2014/main" id="{B53CD1CA-332C-4AC7-9B86-D6AAFE119FED}"/>
+              </a:ext>
+            </a:extLst>
+          </p:cNvPr>
+          <p:cNvSpPr/>
+          <p:nvPr/>
+        </p:nvSpPr>
+        <p:spPr>
+          <a:xfrm>
+            <a:off x="4605867" y="3970867"/>
+            <a:ext cx="1888066" cy="448733"/>
+          </a:xfrm>
+          <a:prstGeom prst="rect">
+            <a:avLst/>
+          </a:prstGeom>
+          <a:noFill/>
+          <a:ln w="28575">
+            <a:solidFill>
+              <a:srgbClr val="FF0000"/>
+            </a:solidFill>
+          </a:ln>
+        </p:spPr>
+        <p:style>
+          <a:lnRef idx="2">
+            <a:schemeClr val="accent1">
+              <a:shade val="50000"/>
+            </a:schemeClr>
+          </a:lnRef>
+          <a:fillRef idx="1">
+            <a:schemeClr val="accent1"/>
+          </a:fillRef>
+          <a:effectRef idx="0">
+            <a:schemeClr val="accent1"/>
+          </a:effectRef>
+          <a:fontRef idx="minor">
+            <a:schemeClr val="lt1"/>
+          </a:fontRef>
+        </p:style>
+        <p:txBody>
+          <a:bodyPr rtlCol="0" anchor="ctr"/>
+          <a:lstStyle/>
+          <a:p>
+            <a:pPr algn="ctr"/>
+            <a:endParaRPr kumimoji="1" lang="ja-JP" altLang="en-US"/>
+          </a:p>
+        </p:txBody>
+      </p:sp>
     </p:spTree>
     <p:extLst>
       <p:ext uri="{BB962C8B-B14F-4D97-AF65-F5344CB8AC3E}">

--- a/ゲーム科3年/00_前期/オンラインゲームプログラミングⅠ/08_Networkオブジェクト.pptx
+++ b/ゲーム科3年/00_前期/オンラインゲームプログラミングⅠ/08_Networkオブジェクト.pptx
@@ -272,7 +272,7 @@
           <a:p>
             <a:fld id="{E9CC885B-4903-4D54-9A93-00025F12DED9}" type="datetimeFigureOut">
               <a:rPr kumimoji="1" lang="ja-JP" altLang="en-US" smtClean="0"/>
-              <a:t>2025/11/6</a:t>
+              <a:t>2026/1/15</a:t>
             </a:fld>
             <a:endParaRPr kumimoji="1" lang="ja-JP" altLang="en-US"/>
           </a:p>
@@ -502,7 +502,7 @@
           <a:p>
             <a:fld id="{E9CC885B-4903-4D54-9A93-00025F12DED9}" type="datetimeFigureOut">
               <a:rPr kumimoji="1" lang="ja-JP" altLang="en-US" smtClean="0"/>
-              <a:t>2025/11/6</a:t>
+              <a:t>2026/1/15</a:t>
             </a:fld>
             <a:endParaRPr kumimoji="1" lang="ja-JP" altLang="en-US"/>
           </a:p>
@@ -742,7 +742,7 @@
           <a:p>
             <a:fld id="{E9CC885B-4903-4D54-9A93-00025F12DED9}" type="datetimeFigureOut">
               <a:rPr kumimoji="1" lang="ja-JP" altLang="en-US" smtClean="0"/>
-              <a:t>2025/11/6</a:t>
+              <a:t>2026/1/15</a:t>
             </a:fld>
             <a:endParaRPr kumimoji="1" lang="ja-JP" altLang="en-US"/>
           </a:p>
@@ -972,7 +972,7 @@
           <a:p>
             <a:fld id="{E9CC885B-4903-4D54-9A93-00025F12DED9}" type="datetimeFigureOut">
               <a:rPr kumimoji="1" lang="ja-JP" altLang="en-US" smtClean="0"/>
-              <a:t>2025/11/6</a:t>
+              <a:t>2026/1/15</a:t>
             </a:fld>
             <a:endParaRPr kumimoji="1" lang="ja-JP" altLang="en-US"/>
           </a:p>
@@ -1247,7 +1247,7 @@
           <a:p>
             <a:fld id="{E9CC885B-4903-4D54-9A93-00025F12DED9}" type="datetimeFigureOut">
               <a:rPr kumimoji="1" lang="ja-JP" altLang="en-US" smtClean="0"/>
-              <a:t>2025/11/6</a:t>
+              <a:t>2026/1/15</a:t>
             </a:fld>
             <a:endParaRPr kumimoji="1" lang="ja-JP" altLang="en-US"/>
           </a:p>
@@ -1576,7 +1576,7 @@
           <a:p>
             <a:fld id="{E9CC885B-4903-4D54-9A93-00025F12DED9}" type="datetimeFigureOut">
               <a:rPr kumimoji="1" lang="ja-JP" altLang="en-US" smtClean="0"/>
-              <a:t>2025/11/6</a:t>
+              <a:t>2026/1/15</a:t>
             </a:fld>
             <a:endParaRPr kumimoji="1" lang="ja-JP" altLang="en-US"/>
           </a:p>
@@ -2052,7 +2052,7 @@
           <a:p>
             <a:fld id="{E9CC885B-4903-4D54-9A93-00025F12DED9}" type="datetimeFigureOut">
               <a:rPr kumimoji="1" lang="ja-JP" altLang="en-US" smtClean="0"/>
-              <a:t>2025/11/6</a:t>
+              <a:t>2026/1/15</a:t>
             </a:fld>
             <a:endParaRPr kumimoji="1" lang="ja-JP" altLang="en-US"/>
           </a:p>
@@ -2193,7 +2193,7 @@
           <a:p>
             <a:fld id="{E9CC885B-4903-4D54-9A93-00025F12DED9}" type="datetimeFigureOut">
               <a:rPr kumimoji="1" lang="ja-JP" altLang="en-US" smtClean="0"/>
-              <a:t>2025/11/6</a:t>
+              <a:t>2026/1/15</a:t>
             </a:fld>
             <a:endParaRPr kumimoji="1" lang="ja-JP" altLang="en-US"/>
           </a:p>
@@ -2306,7 +2306,7 @@
           <a:p>
             <a:fld id="{E9CC885B-4903-4D54-9A93-00025F12DED9}" type="datetimeFigureOut">
               <a:rPr kumimoji="1" lang="ja-JP" altLang="en-US" smtClean="0"/>
-              <a:t>2025/11/6</a:t>
+              <a:t>2026/1/15</a:t>
             </a:fld>
             <a:endParaRPr kumimoji="1" lang="ja-JP" altLang="en-US"/>
           </a:p>
@@ -2649,7 +2649,7 @@
           <a:p>
             <a:fld id="{E9CC885B-4903-4D54-9A93-00025F12DED9}" type="datetimeFigureOut">
               <a:rPr kumimoji="1" lang="ja-JP" altLang="en-US" smtClean="0"/>
-              <a:t>2025/11/6</a:t>
+              <a:t>2026/1/15</a:t>
             </a:fld>
             <a:endParaRPr kumimoji="1" lang="ja-JP" altLang="en-US"/>
           </a:p>
@@ -2937,7 +2937,7 @@
           <a:p>
             <a:fld id="{E9CC885B-4903-4D54-9A93-00025F12DED9}" type="datetimeFigureOut">
               <a:rPr kumimoji="1" lang="ja-JP" altLang="en-US" smtClean="0"/>
-              <a:t>2025/11/6</a:t>
+              <a:t>2026/1/15</a:t>
             </a:fld>
             <a:endParaRPr kumimoji="1" lang="ja-JP" altLang="en-US"/>
           </a:p>
@@ -3210,7 +3210,7 @@
           <a:p>
             <a:fld id="{E9CC885B-4903-4D54-9A93-00025F12DED9}" type="datetimeFigureOut">
               <a:rPr kumimoji="1" lang="ja-JP" altLang="en-US" smtClean="0"/>
-              <a:t>2025/11/6</a:t>
+              <a:t>2026/1/15</a:t>
             </a:fld>
             <a:endParaRPr kumimoji="1" lang="ja-JP" altLang="en-US"/>
           </a:p>
@@ -4134,7 +4134,7 @@
           <a:p>
             <a:r>
               <a:rPr lang="ja-JP" altLang="en-US" sz="2400" dirty="0"/>
-              <a:t>プレイヤーは複数画面に出現します。よって、</a:t>
+              <a:t>プレイヤーは複数体画面に出現します。よって、</a:t>
             </a:r>
             <a:endParaRPr lang="en-US" altLang="ja-JP" sz="2400" dirty="0"/>
           </a:p>
